--- a/catalog/samples/roadmap.pptx
+++ b/catalog/samples/roadmap.pptx
@@ -1072,7 +1072,7 @@
           </a:p>
           <a:p>
             <a:r>
-              <a:t>  "template_sha256": "7a9f7cf0c2d5d1c4b4604f6b4871cce87e62ca98af2772d4ad78520d09d0b23c"</a:t>
+              <a:t>  "template_sha256": "5cf932597116c24aa82713df60278b022b457745b8b7c669fc74be4611cae8d0"</a:t>
             </a:r>
           </a:p>
           <a:p>
